--- a/docs/pitch-decks/gamma/pptx/09-ai-governance-market.pptx
+++ b/docs/pitch-decks/gamma/pptx/09-ai-governance-market.pptx
@@ -3928,7 +3928,7 @@
                   <a:srgbClr val="FFFFFF"/>
                 </a:solidFill>
               </a:rPr>
-              <a:t>"Deploy Datacendia for 90 days on a single strategic problem. If the Council doesn't identify at least 3 critical risks you missed, we refund the pilot fee."</a:t>
+              <a:t>"EU AI Act (2025–2026) → enforceable auditability requirements. DORA → operational traceability for financial services. Litigation risk → retrospective scrutiny of AI decisions. Enterprise AI adoption → exploding unaudited decision surface. This creates a new infrastructure requirement: decision evidence."</a:t>
             </a:r>
             <a:endParaRPr lang="en-US" sz="2200" dirty="0"/>
           </a:p>

--- a/docs/pitch-decks/gamma/pptx/09-ai-governance-market.pptx
+++ b/docs/pitch-decks/gamma/pptx/09-ai-governance-market.pptx
@@ -7862,6 +7862,24 @@
                   <a:srgbClr val="8B8FA3"/>
                 </a:solidFill>
               </a:rPr>
+              <a:t>Community  Free (Apache 2.0, open-source)</a:t>
+            </a:r>
+            <a:endParaRPr lang="en-US" sz="1200" dirty="0"/>
+          </a:p>
+          <a:p>
+            <a:pPr marL="342900" indent="-342900">
+              <a:lnSpc>
+                <a:spcPct val="150000"/>
+              </a:lnSpc>
+              <a:buSzPct val="100000"/>
+              <a:buChar char="→"/>
+            </a:pPr>
+            <a:r>
+              <a:rPr lang="en-US" sz="1200" dirty="0">
+                <a:solidFill>
+                  <a:srgbClr val="8B8FA3"/>
+                </a:solidFill>
+              </a:rPr>
               <a:t>Gross margin &gt;80%. Net dollar retention &gt;130%. CAC payback &lt;18 months. LTV:CAC &gt;5x. Land with Pilot, expand to Enterprise.</a:t>
             </a:r>
             <a:endParaRPr lang="en-US" sz="1200" dirty="0"/>
